--- a/lectures/09-Sequences/CS1910_Sequences_Lecture.pptx
+++ b/lectures/09-Sequences/CS1910_Sequences_Lecture.pptx
@@ -278,7 +278,7 @@
           <a:p>
             <a:fld id="{BB85323A-822E-E84A-9FEB-A103DD03B04F}" type="datetimeFigureOut">
               <a:rPr lang="en-US" smtClean="0"/>
-              <a:t>7/22/2026</a:t>
+              <a:t>10/28/26</a:t>
             </a:fld>
             <a:endParaRPr lang="en-US"/>
           </a:p>
@@ -883,7 +883,7 @@
           <a:p>
             <a:fld id="{1160EA64-D806-43AC-9DF2-F8C432F32B4C}" type="datetimeFigureOut">
               <a:rPr lang="en-US" dirty="0"/>
-              <a:t>7/22/2026</a:t>
+              <a:t>10/28/26</a:t>
             </a:fld>
             <a:endParaRPr lang="en-US" dirty="0"/>
           </a:p>
@@ -1049,7 +1049,7 @@
           <a:p>
             <a:fld id="{E9F9C37B-1D36-470B-8223-D6C91242EC14}" type="datetimeFigureOut">
               <a:rPr lang="en-US" dirty="0"/>
-              <a:t>7/22/2026</a:t>
+              <a:t>10/28/26</a:t>
             </a:fld>
             <a:endParaRPr lang="en-US" dirty="0"/>
           </a:p>
@@ -1224,7 +1224,7 @@
           <a:p>
             <a:fld id="{67C6F52A-A82B-47A2-A83A-8C4C91F2D59F}" type="datetimeFigureOut">
               <a:rPr lang="en-US" dirty="0"/>
-              <a:t>7/22/2026</a:t>
+              <a:t>10/28/26</a:t>
             </a:fld>
             <a:endParaRPr lang="en-US" dirty="0"/>
           </a:p>
@@ -1389,7 +1389,7 @@
           <a:p>
             <a:fld id="{F070A7B3-6521-4DCA-87E5-044747A908C1}" type="datetimeFigureOut">
               <a:rPr lang="en-US" dirty="0"/>
-              <a:t>7/22/2026</a:t>
+              <a:t>10/28/26</a:t>
             </a:fld>
             <a:endParaRPr lang="en-US" dirty="0"/>
           </a:p>
@@ -1653,7 +1653,7 @@
           <a:p>
             <a:fld id="{1160EA64-D806-43AC-9DF2-F8C432F32B4C}" type="datetimeFigureOut">
               <a:rPr lang="en-US" dirty="0"/>
-              <a:t>7/22/2026</a:t>
+              <a:t>10/28/26</a:t>
             </a:fld>
             <a:endParaRPr lang="en-US" dirty="0"/>
           </a:p>
@@ -1881,7 +1881,7 @@
           <a:p>
             <a:fld id="{AB134690-1557-4C89-A502-4959FE7FAD70}" type="datetimeFigureOut">
               <a:rPr lang="en-US" dirty="0"/>
-              <a:t>7/22/2026</a:t>
+              <a:t>10/28/26</a:t>
             </a:fld>
             <a:endParaRPr lang="en-US" dirty="0"/>
           </a:p>
@@ -2235,7 +2235,7 @@
           <a:p>
             <a:fld id="{4F7D4976-E339-4826-83B7-FBD03F55ECF8}" type="datetimeFigureOut">
               <a:rPr lang="en-US" dirty="0"/>
-              <a:t>7/22/2026</a:t>
+              <a:t>10/28/26</a:t>
             </a:fld>
             <a:endParaRPr lang="en-US" dirty="0"/>
           </a:p>
@@ -2371,7 +2371,7 @@
           <a:p>
             <a:fld id="{E1037C31-9E7A-4F99-8774-A0E530DE1A42}" type="datetimeFigureOut">
               <a:rPr lang="en-US" dirty="0"/>
-              <a:t>7/22/2026</a:t>
+              <a:t>10/28/26</a:t>
             </a:fld>
             <a:endParaRPr lang="en-US" dirty="0"/>
           </a:p>
@@ -2461,7 +2461,7 @@
           <a:p>
             <a:fld id="{C278504F-A551-4DE0-9316-4DCD1D8CC752}" type="datetimeFigureOut">
               <a:rPr lang="en-US" dirty="0"/>
-              <a:t>7/22/2026</a:t>
+              <a:t>10/28/26</a:t>
             </a:fld>
             <a:endParaRPr lang="en-US" dirty="0"/>
           </a:p>
@@ -2813,7 +2813,7 @@
           <a:p>
             <a:fld id="{D1BE4249-C0D0-4B06-8692-E8BB871AF643}" type="datetimeFigureOut">
               <a:rPr lang="en-US" dirty="0"/>
-              <a:t>7/22/2026</a:t>
+              <a:t>10/28/26</a:t>
             </a:fld>
             <a:endParaRPr lang="en-US" dirty="0"/>
           </a:p>
@@ -3165,7 +3165,7 @@
           <a:p>
             <a:fld id="{042B0DB6-F5C7-45FB-8CF3-31B45F9C2DAC}" type="datetimeFigureOut">
               <a:rPr lang="en-US" dirty="0"/>
-              <a:t>7/22/2026</a:t>
+              <a:t>10/28/26</a:t>
             </a:fld>
             <a:endParaRPr lang="en-US" dirty="0"/>
           </a:p>
@@ -3402,7 +3402,7 @@
           <a:p>
             <a:fld id="{1160EA64-D806-43AC-9DF2-F8C432F32B4C}" type="datetimeFigureOut">
               <a:rPr lang="en-US" dirty="0"/>
-              <a:t>7/22/2026</a:t>
+              <a:t>10/28/26</a:t>
             </a:fld>
             <a:endParaRPr lang="en-US" dirty="0"/>
           </a:p>
@@ -5035,7 +5035,7 @@
                 <a:effectLst/>
                 <a:latin typeface="JetBrains Mono"/>
               </a:rPr>
-              <a:t># '</a:t>
+              <a:t># </a:t>
             </a:r>
             <a:r>
               <a:rPr lang="en-US" sz="2400" i="1" dirty="0" err="1">
@@ -5045,7 +5045,7 @@
                 <a:effectLst/>
                 <a:latin typeface="JetBrains Mono"/>
               </a:rPr>
-              <a:t>Buebr</a:t>
+              <a:t>Bubry</a:t>
             </a:r>
             <a:r>
               <a:rPr lang="en-US" sz="2400" i="1" dirty="0">
@@ -5182,7 +5182,27 @@
                 <a:effectLst/>
                 <a:latin typeface="JetBrains Mono"/>
               </a:rPr>
-              <a:t># 'ee'</a:t>
+              <a:t># ‘</a:t>
+            </a:r>
+            <a:r>
+              <a:rPr lang="en-US" sz="2400" i="1" dirty="0" err="1">
+                <a:solidFill>
+                  <a:srgbClr val="8C8C8C"/>
+                </a:solidFill>
+                <a:effectLst/>
+                <a:latin typeface="JetBrains Mono"/>
+              </a:rPr>
+              <a:t>ue</a:t>
+            </a:r>
+            <a:r>
+              <a:rPr lang="en-US" sz="2400" i="1" dirty="0">
+                <a:solidFill>
+                  <a:srgbClr val="8C8C8C"/>
+                </a:solidFill>
+                <a:effectLst/>
+                <a:latin typeface="JetBrains Mono"/>
+              </a:rPr>
+              <a:t>'</a:t>
             </a:r>
             <a:endParaRPr lang="en-US" sz="2400" dirty="0">
               <a:solidFill>
@@ -7259,7 +7279,7 @@
               <a:rPr lang="en-US" dirty="0">
                 <a:hlinkClick r:id="rId2"/>
               </a:rPr>
-              <a:t>https://colab.research.google.com/github/cdspower-upei/2026W-CS1910-Students/blob/main/Lectures/L09/L09-Sequences-Examples.ipynb</a:t>
+              <a:t>https://colab.research.google.com/github/UPEI-CS/CS1910-Students/blob/main/lectures/09-Sequences/CS1910_Sequences_Workbook.ipynb</a:t>
             </a:r>
             <a:endParaRPr lang="en-US" dirty="0"/>
           </a:p>
